--- a/chapter7/parts/part-08-best-practices-for-fairness/clip.pptx
+++ b/chapter7/parts/part-08-best-practices-for-fairness/clip.pptx
@@ -4397,10 +4397,12 @@
           </a:bodyPr>
           <a:lstStyle/>
           <a:p>
-            <a:pPr>
+            <a:pPr lvl="0" marL="457200" indent="-228600">
+              <a:buFont typeface="Calibri"/>
               <a:spcAft>
                 <a:spcPts val="1000"/>
               </a:spcAft>
+              <a:buSzPct val="100000"/>
               <a:buChar char="•"/>
               <a:lnSpc>
                 <a:spcPts val="2200"/>
@@ -4417,10 +4419,12 @@
             </a:r>
           </a:p>
           <a:p>
-            <a:pPr>
+            <a:pPr lvl="0" marL="457200" indent="-228600">
+              <a:buFont typeface="Calibri"/>
               <a:spcAft>
                 <a:spcPts val="1000"/>
               </a:spcAft>
+              <a:buSzPct val="100000"/>
               <a:buChar char="•"/>
               <a:lnSpc>
                 <a:spcPts val="2200"/>
@@ -4437,10 +4441,12 @@
             </a:r>
           </a:p>
           <a:p>
-            <a:pPr>
+            <a:pPr lvl="0" marL="457200" indent="-228600">
+              <a:buFont typeface="Calibri"/>
               <a:spcAft>
                 <a:spcPts val="1000"/>
               </a:spcAft>
+              <a:buSzPct val="100000"/>
               <a:buChar char="•"/>
               <a:lnSpc>
                 <a:spcPts val="2200"/>
@@ -4576,10 +4582,12 @@
           </a:bodyPr>
           <a:lstStyle/>
           <a:p>
-            <a:pPr>
+            <a:pPr lvl="0" marL="457200" indent="-228600">
+              <a:buFont typeface="Calibri"/>
               <a:spcAft>
                 <a:spcPts val="1000"/>
               </a:spcAft>
+              <a:buSzPct val="100000"/>
               <a:buChar char="•"/>
               <a:lnSpc>
                 <a:spcPts val="2200"/>
@@ -4596,10 +4604,12 @@
             </a:r>
           </a:p>
           <a:p>
-            <a:pPr>
+            <a:pPr lvl="0" marL="457200" indent="-228600">
+              <a:buFont typeface="Calibri"/>
               <a:spcAft>
                 <a:spcPts val="1000"/>
               </a:spcAft>
+              <a:buSzPct val="100000"/>
               <a:buChar char="•"/>
               <a:lnSpc>
                 <a:spcPts val="2200"/>
@@ -4735,10 +4745,12 @@
           </a:bodyPr>
           <a:lstStyle/>
           <a:p>
-            <a:pPr>
+            <a:pPr lvl="0" marL="457200" indent="-228600">
+              <a:buFont typeface="Calibri"/>
               <a:spcAft>
                 <a:spcPts val="1000"/>
               </a:spcAft>
+              <a:buSzPct val="100000"/>
               <a:buChar char="•"/>
               <a:lnSpc>
                 <a:spcPts val="2200"/>
@@ -4874,10 +4886,12 @@
           </a:bodyPr>
           <a:lstStyle/>
           <a:p>
-            <a:pPr>
+            <a:pPr lvl="0" marL="457200" indent="-228600">
+              <a:buFont typeface="Calibri"/>
               <a:spcAft>
                 <a:spcPts val="1000"/>
               </a:spcAft>
+              <a:buSzPct val="100000"/>
               <a:buChar char="•"/>
               <a:lnSpc>
                 <a:spcPts val="2200"/>
@@ -4894,10 +4908,12 @@
             </a:r>
           </a:p>
           <a:p>
-            <a:pPr>
+            <a:pPr lvl="0" marL="457200" indent="-228600">
+              <a:buFont typeface="Calibri"/>
               <a:spcAft>
                 <a:spcPts val="1000"/>
               </a:spcAft>
+              <a:buSzPct val="100000"/>
               <a:buChar char="•"/>
               <a:lnSpc>
                 <a:spcPts val="2200"/>
@@ -4914,10 +4930,12 @@
             </a:r>
           </a:p>
           <a:p>
-            <a:pPr>
+            <a:pPr lvl="0" marL="457200" indent="-228600">
+              <a:buFont typeface="Calibri"/>
               <a:spcAft>
                 <a:spcPts val="1000"/>
               </a:spcAft>
+              <a:buSzPct val="100000"/>
               <a:buChar char="•"/>
               <a:lnSpc>
                 <a:spcPts val="2200"/>
@@ -5053,10 +5071,12 @@
           </a:bodyPr>
           <a:lstStyle/>
           <a:p>
-            <a:pPr>
+            <a:pPr lvl="0" marL="457200" indent="-228600">
+              <a:buFont typeface="Calibri"/>
               <a:spcAft>
                 <a:spcPts val="1000"/>
               </a:spcAft>
+              <a:buSzPct val="100000"/>
               <a:buChar char="•"/>
               <a:lnSpc>
                 <a:spcPts val="2200"/>
@@ -5073,10 +5093,12 @@
             </a:r>
           </a:p>
           <a:p>
-            <a:pPr>
+            <a:pPr lvl="0" marL="457200" indent="-228600">
+              <a:buFont typeface="Calibri"/>
               <a:spcAft>
                 <a:spcPts val="1000"/>
               </a:spcAft>
+              <a:buSzPct val="100000"/>
               <a:buChar char="•"/>
               <a:lnSpc>
                 <a:spcPts val="2200"/>
@@ -5093,10 +5115,12 @@
             </a:r>
           </a:p>
           <a:p>
-            <a:pPr>
+            <a:pPr lvl="0" marL="457200" indent="-228600">
+              <a:buFont typeface="Calibri"/>
               <a:spcAft>
                 <a:spcPts val="1000"/>
               </a:spcAft>
+              <a:buSzPct val="100000"/>
               <a:buChar char="•"/>
               <a:lnSpc>
                 <a:spcPts val="2200"/>
@@ -5232,10 +5256,12 @@
           </a:bodyPr>
           <a:lstStyle/>
           <a:p>
-            <a:pPr>
+            <a:pPr lvl="0" marL="457200" indent="-228600">
+              <a:buFont typeface="Calibri"/>
               <a:spcAft>
                 <a:spcPts val="1000"/>
               </a:spcAft>
+              <a:buSzPct val="100000"/>
               <a:buChar char="•"/>
               <a:lnSpc>
                 <a:spcPts val="2200"/>
@@ -5252,10 +5278,12 @@
             </a:r>
           </a:p>
           <a:p>
-            <a:pPr>
+            <a:pPr lvl="0" marL="457200" indent="-228600">
+              <a:buFont typeface="Calibri"/>
               <a:spcAft>
                 <a:spcPts val="1000"/>
               </a:spcAft>
+              <a:buSzPct val="100000"/>
               <a:buChar char="•"/>
               <a:lnSpc>
                 <a:spcPts val="2200"/>
@@ -5272,10 +5300,12 @@
             </a:r>
           </a:p>
           <a:p>
-            <a:pPr>
+            <a:pPr lvl="0" marL="457200" indent="-228600">
+              <a:buFont typeface="Calibri"/>
               <a:spcAft>
                 <a:spcPts val="1000"/>
               </a:spcAft>
+              <a:buSzPct val="100000"/>
               <a:buChar char="•"/>
               <a:lnSpc>
                 <a:spcPts val="2200"/>
@@ -5411,10 +5441,12 @@
           </a:bodyPr>
           <a:lstStyle/>
           <a:p>
-            <a:pPr>
+            <a:pPr lvl="0" marL="457200" indent="-228600">
+              <a:buFont typeface="Calibri"/>
               <a:spcAft>
                 <a:spcPts val="1000"/>
               </a:spcAft>
+              <a:buSzPct val="100000"/>
               <a:buChar char="•"/>
               <a:lnSpc>
                 <a:spcPts val="2200"/>
@@ -5431,10 +5463,12 @@
             </a:r>
           </a:p>
           <a:p>
-            <a:pPr>
+            <a:pPr lvl="0" marL="457200" indent="-228600">
+              <a:buFont typeface="Calibri"/>
               <a:spcAft>
                 <a:spcPts val="1000"/>
               </a:spcAft>
+              <a:buSzPct val="100000"/>
               <a:buChar char="•"/>
               <a:lnSpc>
                 <a:spcPts val="2200"/>
@@ -5451,10 +5485,12 @@
             </a:r>
           </a:p>
           <a:p>
-            <a:pPr>
+            <a:pPr lvl="0" marL="457200" indent="-228600">
+              <a:buFont typeface="Calibri"/>
               <a:spcAft>
                 <a:spcPts val="1000"/>
               </a:spcAft>
+              <a:buSzPct val="100000"/>
               <a:buChar char="•"/>
               <a:lnSpc>
                 <a:spcPts val="2200"/>
@@ -5590,10 +5626,12 @@
           </a:bodyPr>
           <a:lstStyle/>
           <a:p>
-            <a:pPr>
+            <a:pPr lvl="0" marL="457200" indent="-228600">
+              <a:buFont typeface="Calibri"/>
               <a:spcAft>
                 <a:spcPts val="1000"/>
               </a:spcAft>
+              <a:buSzPct val="100000"/>
               <a:buChar char="•"/>
               <a:lnSpc>
                 <a:spcPts val="2200"/>
@@ -5610,10 +5648,12 @@
             </a:r>
           </a:p>
           <a:p>
-            <a:pPr>
+            <a:pPr lvl="0" marL="457200" indent="-228600">
+              <a:buFont typeface="Calibri"/>
               <a:spcAft>
                 <a:spcPts val="1000"/>
               </a:spcAft>
+              <a:buSzPct val="100000"/>
               <a:buChar char="•"/>
               <a:lnSpc>
                 <a:spcPts val="2200"/>
@@ -5630,10 +5670,12 @@
             </a:r>
           </a:p>
           <a:p>
-            <a:pPr>
+            <a:pPr lvl="0" marL="457200" indent="-228600">
+              <a:buFont typeface="Calibri"/>
               <a:spcAft>
                 <a:spcPts val="1000"/>
               </a:spcAft>
+              <a:buSzPct val="100000"/>
               <a:buChar char="•"/>
               <a:lnSpc>
                 <a:spcPts val="2200"/>
@@ -5769,10 +5811,12 @@
           </a:bodyPr>
           <a:lstStyle/>
           <a:p>
-            <a:pPr>
+            <a:pPr lvl="0" marL="457200" indent="-228600">
+              <a:buFont typeface="Calibri"/>
               <a:spcAft>
                 <a:spcPts val="1000"/>
               </a:spcAft>
+              <a:buSzPct val="100000"/>
               <a:buChar char="•"/>
               <a:lnSpc>
                 <a:spcPts val="2200"/>
@@ -5789,10 +5833,12 @@
             </a:r>
           </a:p>
           <a:p>
-            <a:pPr>
+            <a:pPr lvl="0" marL="457200" indent="-228600">
+              <a:buFont typeface="Calibri"/>
               <a:spcAft>
                 <a:spcPts val="1000"/>
               </a:spcAft>
+              <a:buSzPct val="100000"/>
               <a:buChar char="•"/>
               <a:lnSpc>
                 <a:spcPts val="2200"/>
@@ -5809,10 +5855,12 @@
             </a:r>
           </a:p>
           <a:p>
-            <a:pPr>
+            <a:pPr lvl="0" marL="457200" indent="-228600">
+              <a:buFont typeface="Calibri"/>
               <a:spcAft>
                 <a:spcPts val="1000"/>
               </a:spcAft>
+              <a:buSzPct val="100000"/>
               <a:buChar char="•"/>
               <a:lnSpc>
                 <a:spcPts val="2200"/>
@@ -5948,10 +5996,12 @@
           </a:bodyPr>
           <a:lstStyle/>
           <a:p>
-            <a:pPr>
+            <a:pPr lvl="0" marL="457200" indent="-228600">
+              <a:buFont typeface="Calibri"/>
               <a:spcAft>
                 <a:spcPts val="1000"/>
               </a:spcAft>
+              <a:buSzPct val="100000"/>
               <a:buChar char="•"/>
               <a:lnSpc>
                 <a:spcPts val="2200"/>
@@ -5968,10 +6018,12 @@
             </a:r>
           </a:p>
           <a:p>
-            <a:pPr>
+            <a:pPr lvl="0" marL="457200" indent="-228600">
+              <a:buFont typeface="Calibri"/>
               <a:spcAft>
                 <a:spcPts val="1000"/>
               </a:spcAft>
+              <a:buSzPct val="100000"/>
               <a:buChar char="•"/>
               <a:lnSpc>
                 <a:spcPts val="2200"/>
